--- a/carpentry/intake-142/PowerPoint/Day-14_2026-11-24_Week-5.pptx
+++ b/carpentry/intake-142/PowerPoint/Day-14_2026-11-24_Week-5.pptx
@@ -1092,7 +1092,7 @@
           <a:p/>
           <a:p>
             <a:r>
-              <a:t>The table on textbook page 110 collects imperial length relationships. One foot is twelve inches, one yard is three feet and therefore thirty-six inches. These are equal lengths written in different units. How can we confirm a yard equals thirty-six inches? Three feet times twelve inches per foot gives thirty-six inches. Pay attention to the symbols: a single prime mark denotes feet and a double prime denotes inches. Read them aloud when copying a dimension so a small symbol does not become a large cutting error. Use the table to select the relationship you actually need.</a:t>
+              <a:t>The table on textbook page 166 collects imperial length relationships. One foot is twelve inches, one yard is three feet and therefore thirty-six inches. These are equal lengths written in different units. How can we confirm a yard equals thirty-six inches? Three feet times twelve inches per foot gives thirty-six inches. Pay attention to the symbols: a single prime mark denotes feet and a double prime denotes inches. Read them aloud when copying a dimension so a small symbol does not become a large cutting error. Use the table to select the relationship you actually need.</a:t>
             </a:r>
           </a:p>
         </p:txBody>
@@ -2642,7 +2642,7 @@
           <a:p/>
           <a:p>
             <a:r>
-              <a:t>The conversion table on textbook page 111 gives exact factors. For inches to millimetres, the factor is 25.4; inches to centimetres uses 2.54. A foot is exactly 0.3048 metre. Which factor belongs in an inch-to-millimetre calculation? 25.4, with millimetres per inch written beside it. Do not select a factor merely because the number looks familiar; read the “from” and “to” units. To go in the reverse direction, divide by the stated factor. The table’s long decimals are precise definitions, so keep all their digits when the assigned conversion calls for them.</a:t>
+              <a:t>The conversion table on textbook pages 167–168 gives exact factors. For inches to millimetres, the factor is 25.4; inches to centimetres uses 2.54. A foot is exactly 0.3048 metre. Which factor belongs in an inch-to-millimetre calculation? 25.4, with millimetres per inch written beside it. Do not select a factor merely because the number looks familiar; read the “from” and “to” units. To go in the reverse direction, divide by the stated factor. The table’s long decimals are precise definitions, so keep all their digits when the assigned conversion calls for them.</a:t>
             </a:r>
           </a:p>
         </p:txBody>
@@ -5480,7 +5480,7 @@
                 </a:solidFill>
                 <a:latin typeface="Arial"/>
               </a:rPr>
-              <a:t>Textbook  |  page 110</a:t>
+              <a:t>Textbook  |  page 166</a:t>
             </a:r>
           </a:p>
         </p:txBody>
@@ -5528,7 +5528,7 @@
                 </a:solidFill>
                 <a:latin typeface="Arial"/>
               </a:rPr>
-              <a:t>Textbook sections 7.1–7.2 pp.108–110; sections 4.2 pp.57–58</a:t>
+              <a:t>Textbook sections 7.1–7.2 pp.164–166; sections 4.2 pp.89–90</a:t>
             </a:r>
           </a:p>
         </p:txBody>
@@ -5600,7 +5600,7 @@
                 </a:solidFill>
                 <a:latin typeface="Arial"/>
               </a:rPr>
-              <a:t>Textbook p.110 • Example 7.3 — Adding feet and inches</a:t>
+              <a:t>Textbook p.166 • Example 7.3 — Adding feet and inches</a:t>
             </a:r>
           </a:p>
         </p:txBody>
@@ -6214,7 +6214,7 @@
                 </a:solidFill>
                 <a:latin typeface="Arial"/>
               </a:rPr>
-              <a:t>Textbook sections 7.1–7.2 pp.108–110; sections 4.2 pp.57–58</a:t>
+              <a:t>Textbook sections 7.1–7.2 pp.164–166; sections 4.2 pp.89–90</a:t>
             </a:r>
           </a:p>
         </p:txBody>
@@ -6972,7 +6972,7 @@
                 </a:solidFill>
                 <a:latin typeface="Arial"/>
               </a:rPr>
-              <a:t>Textbook sections 7.1–7.2 pp.108–110; sections 4.2 pp.57–58</a:t>
+              <a:t>Textbook sections 7.1–7.2 pp.164–166; sections 4.2 pp.89–90</a:t>
             </a:r>
           </a:p>
         </p:txBody>
@@ -7172,7 +7172,7 @@
                 </a:solidFill>
                 <a:latin typeface="Arial"/>
               </a:rPr>
-              <a:t>Resources: Exercise Book 7A Q1–10 (p.45); 5A Q3 (p.32)</a:t>
+              <a:t>Resources: Exercise Book 7A Q1–10 (p.67); 5A Q3 (p.45)</a:t>
             </a:r>
           </a:p>
         </p:txBody>
@@ -7786,7 +7786,7 @@
                 </a:solidFill>
                 <a:latin typeface="Arial"/>
               </a:rPr>
-              <a:t>Textbook sections 7.1–7.2 pp.108–110; sections 4.2 pp.57–58</a:t>
+              <a:t>Textbook sections 7.1–7.2 pp.164–166; sections 4.2 pp.89–90</a:t>
             </a:r>
           </a:p>
         </p:txBody>
@@ -8542,7 +8542,7 @@
                 </a:solidFill>
                 <a:latin typeface="Arial"/>
               </a:rPr>
-              <a:t>Textbook sections 7.1–7.2 pp.108–110; sections 4.2 pp.57–58</a:t>
+              <a:t>Textbook sections 7.1–7.2 pp.164–166; sections 4.2 pp.89–90</a:t>
             </a:r>
           </a:p>
         </p:txBody>
@@ -9276,7 +9276,7 @@
                 </a:solidFill>
                 <a:latin typeface="Arial"/>
               </a:rPr>
-              <a:t>Textbook sections 7.1–7.2 pp.108–110; sections 4.2 pp.57–58</a:t>
+              <a:t>Textbook sections 7.1–7.2 pp.164–166; sections 4.2 pp.89–90</a:t>
             </a:r>
           </a:p>
         </p:txBody>
@@ -9476,7 +9476,7 @@
                 </a:solidFill>
                 <a:latin typeface="Arial"/>
               </a:rPr>
-              <a:t>Resources: Exercise Book 7A Q1–10 (p.45); 5A Q3 (p.32)</a:t>
+              <a:t>Resources: Exercise Book 7A Q1–10 (p.67); 5A Q3 (p.45)</a:t>
             </a:r>
           </a:p>
         </p:txBody>
@@ -10090,7 +10090,7 @@
                 </a:solidFill>
                 <a:latin typeface="Arial"/>
               </a:rPr>
-              <a:t>Textbook sections 7.1–7.2 pp.108–110; sections 4.2 pp.57–58</a:t>
+              <a:t>Textbook sections 7.1–7.2 pp.164–166; sections 4.2 pp.89–90</a:t>
             </a:r>
           </a:p>
         </p:txBody>
@@ -10866,7 +10866,7 @@
                 </a:solidFill>
                 <a:latin typeface="Arial"/>
               </a:rPr>
-              <a:t>Textbook sections 7.1–7.2 pp.108–110; sections 4.2 pp.57–58</a:t>
+              <a:t>Textbook sections 7.1–7.2 pp.164–166; sections 4.2 pp.89–90</a:t>
             </a:r>
           </a:p>
         </p:txBody>
@@ -11825,7 +11825,7 @@
                 </a:solidFill>
                 <a:latin typeface="Arial"/>
               </a:rPr>
-              <a:t>Textbook sections 7.1–7.2 pp.108–110; sections 4.2 pp.57–58</a:t>
+              <a:t>Textbook sections 7.1–7.2 pp.164–166; sections 4.2 pp.89–90</a:t>
             </a:r>
           </a:p>
         </p:txBody>
@@ -12536,7 +12536,7 @@
                 </a:solidFill>
                 <a:latin typeface="Arial"/>
               </a:rPr>
-              <a:t>Textbook sections 7.1–7.2 pp.108–110; sections 4.2 pp.57–58</a:t>
+              <a:t>Textbook sections 7.1–7.2 pp.164–166; sections 4.2 pp.89–90</a:t>
             </a:r>
           </a:p>
         </p:txBody>
@@ -16574,7 +16574,7 @@
                 </a:solidFill>
                 <a:latin typeface="Arial"/>
               </a:rPr>
-              <a:t>Textbook sections 7.1–7.2 pp.108–110; sections 4.2 pp.57–58</a:t>
+              <a:t>Textbook sections 7.1–7.2 pp.164–166; sections 4.2 pp.89–90</a:t>
             </a:r>
           </a:p>
         </p:txBody>
@@ -16774,7 +16774,7 @@
                 </a:solidFill>
                 <a:latin typeface="Arial"/>
               </a:rPr>
-              <a:t>Resources: Exercise Book 7A Q1–10 (p.45); 5A Q3 (p.32)</a:t>
+              <a:t>Resources: Exercise Book 7A Q1–10 (p.67); 5A Q3 (p.45)</a:t>
             </a:r>
           </a:p>
         </p:txBody>
@@ -17388,7 +17388,7 @@
                 </a:solidFill>
                 <a:latin typeface="Arial"/>
               </a:rPr>
-              <a:t>Textbook sections 7.1–7.2 pp.108–110; sections 4.2 pp.57–58</a:t>
+              <a:t>Textbook sections 7.1–7.2 pp.164–166; sections 4.2 pp.89–90</a:t>
             </a:r>
           </a:p>
         </p:txBody>
@@ -18099,7 +18099,7 @@
                 </a:solidFill>
                 <a:latin typeface="Arial"/>
               </a:rPr>
-              <a:t>Textbook sections 7.1–7.2 pp.108–110; sections 4.2 pp.57–58</a:t>
+              <a:t>Textbook sections 7.1–7.2 pp.164–166; sections 4.2 pp.89–90</a:t>
             </a:r>
           </a:p>
         </p:txBody>
@@ -18785,7 +18785,7 @@
                 </a:solidFill>
                 <a:latin typeface="Arial"/>
               </a:rPr>
-              <a:t>Textbook sections 7.1–7.2 pp.108–110; sections 4.2 pp.57–58</a:t>
+              <a:t>Textbook sections 7.1–7.2 pp.164–166; sections 4.2 pp.89–90</a:t>
             </a:r>
           </a:p>
         </p:txBody>
@@ -18985,7 +18985,7 @@
                 </a:solidFill>
                 <a:latin typeface="Arial"/>
               </a:rPr>
-              <a:t>Resources: Exercise Book 7A Q1–10 (p.45); 5A Q3 (p.32)</a:t>
+              <a:t>Resources: Exercise Book 7A Q1–10 (p.67); 5A Q3 (p.45)</a:t>
             </a:r>
           </a:p>
         </p:txBody>
@@ -20264,7 +20264,7 @@
                 </a:solidFill>
                 <a:latin typeface="Arial"/>
               </a:rPr>
-              <a:t>Textbook sections 7.3 pp.111–112; conversion factors pp.220–221</a:t>
+              <a:t>Textbook sections 7.3 pp.167–169; conversion factors pp.362–363</a:t>
             </a:r>
           </a:p>
         </p:txBody>
@@ -20464,7 +20464,7 @@
                 </a:solidFill>
                 <a:latin typeface="Arial"/>
               </a:rPr>
-              <a:t>Textbook sections 7.3 pp.111–112; conversion factors pp.220–221</a:t>
+              <a:t>Textbook sections 7.3 pp.167–169; conversion factors pp.362–363</a:t>
             </a:r>
           </a:p>
         </p:txBody>
@@ -20512,7 +20512,7 @@
                 </a:solidFill>
                 <a:latin typeface="Arial"/>
               </a:rPr>
-              <a:t>Exercise Book 7A Q11–16 (pp.45–46); 7B Q1–2 (p.47); 7C Q1–3 (p.49)</a:t>
+              <a:t>Exercise Book 7A Q11–16 (p.68); 7B Q1–2 (p.69); 7C Q1–3 (p.71)</a:t>
             </a:r>
           </a:p>
         </p:txBody>
@@ -21174,7 +21174,7 @@
                 </a:solidFill>
                 <a:latin typeface="Arial"/>
               </a:rPr>
-              <a:t>Textbook sections 7.3 pp.111–112; conversion factors pp.220–221</a:t>
+              <a:t>Textbook sections 7.3 pp.167–169; conversion factors pp.362–363</a:t>
             </a:r>
           </a:p>
         </p:txBody>
@@ -21374,7 +21374,7 @@
                 </a:solidFill>
                 <a:latin typeface="Arial"/>
               </a:rPr>
-              <a:t>Resources: Exercise Book 7A Q11–16 (pp.45–46); 7B Q1–2 (p.47); 7C Q1–3 (p.49)</a:t>
+              <a:t>Resources: Exercise Book 7A Q11–16 (p.68); 7B Q1–2 (p.69); 7C Q1–3 (p.71)</a:t>
             </a:r>
           </a:p>
         </p:txBody>
@@ -22123,7 +22123,7 @@
                 </a:solidFill>
                 <a:latin typeface="Arial"/>
               </a:rPr>
-              <a:t>Textbook sections 7.3 pp.111–112; conversion factors pp.220–221</a:t>
+              <a:t>Textbook sections 7.3 pp.167–169; conversion factors pp.362–363</a:t>
             </a:r>
           </a:p>
         </p:txBody>
@@ -23368,7 +23368,7 @@
                 </a:solidFill>
                 <a:latin typeface="Arial"/>
               </a:rPr>
-              <a:t>Textbook sections 7.3 pp.111–112; conversion factors pp.220–221</a:t>
+              <a:t>Textbook sections 7.3 pp.167–169; conversion factors pp.362–363</a:t>
             </a:r>
           </a:p>
         </p:txBody>
@@ -25251,7 +25251,7 @@
                 </a:solidFill>
                 <a:latin typeface="Arial"/>
               </a:rPr>
-              <a:t>Textbook sections 7.1–7.2 pp.108–110; sections 4.2 pp.57–58</a:t>
+              <a:t>Textbook sections 7.1–7.2 pp.164–166; sections 4.2 pp.89–90</a:t>
             </a:r>
           </a:p>
         </p:txBody>
@@ -25451,7 +25451,7 @@
                 </a:solidFill>
                 <a:latin typeface="Arial"/>
               </a:rPr>
-              <a:t>Textbook sections 7.1–7.2 pp.108–110; sections 4.2 pp.57–58</a:t>
+              <a:t>Textbook sections 7.1–7.2 pp.164–166; sections 4.2 pp.89–90</a:t>
             </a:r>
           </a:p>
         </p:txBody>
@@ -25499,7 +25499,7 @@
                 </a:solidFill>
                 <a:latin typeface="Arial"/>
               </a:rPr>
-              <a:t>Exercise Book 7A Q1–10 (p.45); 5A Q3 (p.32)</a:t>
+              <a:t>Exercise Book 7A Q1–10 (p.67); 5A Q3 (p.45)</a:t>
             </a:r>
           </a:p>
         </p:txBody>
@@ -26113,7 +26113,7 @@
                 </a:solidFill>
                 <a:latin typeface="Arial"/>
               </a:rPr>
-              <a:t>Textbook  |  page 111</a:t>
+              <a:t>Textbook  |  pages 167–168</a:t>
             </a:r>
           </a:p>
         </p:txBody>
@@ -26161,7 +26161,7 @@
                 </a:solidFill>
                 <a:latin typeface="Arial"/>
               </a:rPr>
-              <a:t>Textbook sections 7.3 pp.111–112; conversion factors pp.220–221</a:t>
+              <a:t>Textbook sections 7.3 pp.167–169; conversion factors pp.362–363</a:t>
             </a:r>
           </a:p>
         </p:txBody>
@@ -26233,7 +26233,7 @@
                 </a:solidFill>
                 <a:latin typeface="Arial"/>
               </a:rPr>
-              <a:t>Textbook p.111 • Exact inch–millimetre conversion factors</a:t>
+              <a:t>Textbook pp.167–168 • Exact inch–millimetre conversion factors</a:t>
             </a:r>
           </a:p>
         </p:txBody>
@@ -26799,7 +26799,7 @@
                 </a:solidFill>
                 <a:latin typeface="Arial"/>
               </a:rPr>
-              <a:t>Textbook  |  page 111</a:t>
+              <a:t>Textbook  |  page 168</a:t>
             </a:r>
           </a:p>
         </p:txBody>
@@ -26847,7 +26847,7 @@
                 </a:solidFill>
                 <a:latin typeface="Arial"/>
               </a:rPr>
-              <a:t>Textbook sections 7.3 pp.111–112; conversion factors pp.220–221</a:t>
+              <a:t>Textbook sections 7.3 pp.167–169; conversion factors pp.362–363</a:t>
             </a:r>
           </a:p>
         </p:txBody>
@@ -26919,7 +26919,7 @@
                 </a:solidFill>
                 <a:latin typeface="Arial"/>
               </a:rPr>
-              <a:t>Textbook p.111 • Example 7.4 — Fractional inches to millimetres</a:t>
+              <a:t>Textbook p.168 • Example 7.4 — Fractional inches to millimetres</a:t>
             </a:r>
           </a:p>
         </p:txBody>
@@ -27533,7 +27533,7 @@
                 </a:solidFill>
                 <a:latin typeface="Arial"/>
               </a:rPr>
-              <a:t>Textbook sections 7.3 pp.111–112; conversion factors pp.220–221</a:t>
+              <a:t>Textbook sections 7.3 pp.167–169; conversion factors pp.362–363</a:t>
             </a:r>
           </a:p>
         </p:txBody>
@@ -28291,7 +28291,7 @@
                 </a:solidFill>
                 <a:latin typeface="Arial"/>
               </a:rPr>
-              <a:t>Textbook sections 7.3 pp.111–112; conversion factors pp.220–221</a:t>
+              <a:t>Textbook sections 7.3 pp.167–169; conversion factors pp.362–363</a:t>
             </a:r>
           </a:p>
         </p:txBody>
@@ -28491,7 +28491,7 @@
                 </a:solidFill>
                 <a:latin typeface="Arial"/>
               </a:rPr>
-              <a:t>Resources: Exercise Book 7A Q11–16 (pp.45–46); 7B Q1–2 (p.47); 7C Q1–3 (p.49)</a:t>
+              <a:t>Resources: Exercise Book 7A Q11–16 (p.68); 7B Q1–2 (p.69); 7C Q1–3 (p.71)</a:t>
             </a:r>
           </a:p>
         </p:txBody>
@@ -29105,7 +29105,7 @@
                 </a:solidFill>
                 <a:latin typeface="Arial"/>
               </a:rPr>
-              <a:t>Textbook sections 7.3 pp.111–112; conversion factors pp.220–221</a:t>
+              <a:t>Textbook sections 7.3 pp.167–169; conversion factors pp.362–363</a:t>
             </a:r>
           </a:p>
         </p:txBody>
@@ -29861,7 +29861,7 @@
                 </a:solidFill>
                 <a:latin typeface="Arial"/>
               </a:rPr>
-              <a:t>Textbook sections 7.3 pp.111–112; conversion factors pp.220–221</a:t>
+              <a:t>Textbook sections 7.3 pp.167–169; conversion factors pp.362–363</a:t>
             </a:r>
           </a:p>
         </p:txBody>
@@ -30595,7 +30595,7 @@
                 </a:solidFill>
                 <a:latin typeface="Arial"/>
               </a:rPr>
-              <a:t>Textbook sections 7.3 pp.111–112; conversion factors pp.220–221</a:t>
+              <a:t>Textbook sections 7.3 pp.167–169; conversion factors pp.362–363</a:t>
             </a:r>
           </a:p>
         </p:txBody>
@@ -30795,7 +30795,7 @@
                 </a:solidFill>
                 <a:latin typeface="Arial"/>
               </a:rPr>
-              <a:t>Resources: Exercise Book 7A Q11–16 (pp.45–46); 7B Q1–2 (p.47); 7C Q1–3 (p.49)</a:t>
+              <a:t>Resources: Exercise Book 7A Q11–16 (p.68); 7B Q1–2 (p.69); 7C Q1–3 (p.71)</a:t>
             </a:r>
           </a:p>
         </p:txBody>
@@ -31409,7 +31409,7 @@
                 </a:solidFill>
                 <a:latin typeface="Arial"/>
               </a:rPr>
-              <a:t>Textbook sections 7.3 pp.111–112; conversion factors pp.220–221</a:t>
+              <a:t>Textbook sections 7.3 pp.167–169; conversion factors pp.362–363</a:t>
             </a:r>
           </a:p>
         </p:txBody>
@@ -32185,7 +32185,7 @@
                 </a:solidFill>
                 <a:latin typeface="Arial"/>
               </a:rPr>
-              <a:t>Textbook sections 7.3 pp.111–112; conversion factors pp.220–221</a:t>
+              <a:t>Textbook sections 7.3 pp.167–169; conversion factors pp.362–363</a:t>
             </a:r>
           </a:p>
         </p:txBody>
@@ -33144,7 +33144,7 @@
                 </a:solidFill>
                 <a:latin typeface="Arial"/>
               </a:rPr>
-              <a:t>Textbook sections 7.3 pp.111–112; conversion factors pp.220–221</a:t>
+              <a:t>Textbook sections 7.3 pp.167–169; conversion factors pp.362–363</a:t>
             </a:r>
           </a:p>
         </p:txBody>
@@ -33855,7 +33855,7 @@
                 </a:solidFill>
                 <a:latin typeface="Arial"/>
               </a:rPr>
-              <a:t>Textbook sections 7.1–7.2 pp.108–110; sections 4.2 pp.57–58</a:t>
+              <a:t>Textbook sections 7.1–7.2 pp.164–166; sections 4.2 pp.89–90</a:t>
             </a:r>
           </a:p>
         </p:txBody>
@@ -34055,7 +34055,7 @@
                 </a:solidFill>
                 <a:latin typeface="Arial"/>
               </a:rPr>
-              <a:t>Resources: Exercise Book 7A Q1–10 (p.45); 5A Q3 (p.32)</a:t>
+              <a:t>Resources: Exercise Book 7A Q1–10 (p.67); 5A Q3 (p.45)</a:t>
             </a:r>
           </a:p>
         </p:txBody>
@@ -34669,7 +34669,7 @@
                 </a:solidFill>
                 <a:latin typeface="Arial"/>
               </a:rPr>
-              <a:t>Textbook sections 7.3 pp.111–112; conversion factors pp.220–221</a:t>
+              <a:t>Textbook sections 7.3 pp.167–169; conversion factors pp.362–363</a:t>
             </a:r>
           </a:p>
         </p:txBody>
@@ -35355,7 +35355,7 @@
                 </a:solidFill>
                 <a:latin typeface="Arial"/>
               </a:rPr>
-              <a:t>Textbook sections 7.3 pp.111–112; conversion factors pp.220–221</a:t>
+              <a:t>Textbook sections 7.3 pp.167–169; conversion factors pp.362–363</a:t>
             </a:r>
           </a:p>
         </p:txBody>
@@ -35555,7 +35555,7 @@
                 </a:solidFill>
                 <a:latin typeface="Arial"/>
               </a:rPr>
-              <a:t>Resources: Exercise Book 7A Q11–16 (pp.45–46); 7B Q1–2 (p.47); 7C Q1–3 (p.49)</a:t>
+              <a:t>Resources: Exercise Book 7A Q11–16 (p.68); 7B Q1–2 (p.69); 7C Q1–3 (p.71)</a:t>
             </a:r>
           </a:p>
         </p:txBody>
@@ -36169,7 +36169,7 @@
                 </a:solidFill>
                 <a:latin typeface="Arial"/>
               </a:rPr>
-              <a:t>Textbook sections 7.3 pp.111–112; conversion factors pp.220–221</a:t>
+              <a:t>Textbook sections 7.3 pp.167–169; conversion factors pp.362–363</a:t>
             </a:r>
           </a:p>
         </p:txBody>
@@ -36855,7 +36855,7 @@
                 </a:solidFill>
                 <a:latin typeface="Arial"/>
               </a:rPr>
-              <a:t>Textbook sections 7.3 pp.111–112; conversion factors pp.220–221</a:t>
+              <a:t>Textbook sections 7.3 pp.167–169; conversion factors pp.362–363</a:t>
             </a:r>
           </a:p>
         </p:txBody>
@@ -37541,7 +37541,7 @@
                 </a:solidFill>
                 <a:latin typeface="Arial"/>
               </a:rPr>
-              <a:t>Textbook sections 7.3 pp.111–112; conversion factors pp.220–221</a:t>
+              <a:t>Textbook sections 7.3 pp.167–169; conversion factors pp.362–363</a:t>
             </a:r>
           </a:p>
         </p:txBody>
@@ -37741,7 +37741,7 @@
                 </a:solidFill>
                 <a:latin typeface="Arial"/>
               </a:rPr>
-              <a:t>Resources: Exercise Book 7A Q11–16 (pp.45–46); 7B Q1–2 (p.47); 7C Q1–3 (p.49)</a:t>
+              <a:t>Resources: Exercise Book 7A Q11–16 (p.68); 7B Q1–2 (p.69); 7C Q1–3 (p.71)</a:t>
             </a:r>
           </a:p>
         </p:txBody>
@@ -38355,7 +38355,7 @@
                 </a:solidFill>
                 <a:latin typeface="Arial"/>
               </a:rPr>
-              <a:t>Textbook sections 7.1–7.2 pp.108–110; sections 4.2 pp.57–58</a:t>
+              <a:t>Textbook sections 7.1–7.2 pp.164–166; sections 4.2 pp.89–90</a:t>
             </a:r>
           </a:p>
         </p:txBody>
@@ -39176,7 +39176,7 @@
                 </a:solidFill>
                 <a:latin typeface="Arial"/>
               </a:rPr>
-              <a:t>Textbook sections 7.1–7.2 pp.108–110; sections 4.2 pp.57–58</a:t>
+              <a:t>Textbook sections 7.1–7.2 pp.164–166; sections 4.2 pp.89–90</a:t>
             </a:r>
           </a:p>
         </p:txBody>
@@ -40421,7 +40421,7 @@
                 </a:solidFill>
                 <a:latin typeface="Arial"/>
               </a:rPr>
-              <a:t>Textbook sections 7.1–7.2 pp.108–110; sections 4.2 pp.57–58</a:t>
+              <a:t>Textbook sections 7.1–7.2 pp.164–166; sections 4.2 pp.89–90</a:t>
             </a:r>
           </a:p>
         </p:txBody>
@@ -42349,7 +42349,7 @@
                 </a:solidFill>
                 <a:latin typeface="Arial"/>
               </a:rPr>
-              <a:t>Textbook  |  page 110</a:t>
+              <a:t>Textbook  |  page 166</a:t>
             </a:r>
           </a:p>
         </p:txBody>
@@ -42397,7 +42397,7 @@
                 </a:solidFill>
                 <a:latin typeface="Arial"/>
               </a:rPr>
-              <a:t>Textbook sections 7.1–7.2 pp.108–110; sections 4.2 pp.57–58</a:t>
+              <a:t>Textbook sections 7.1–7.2 pp.164–166; sections 4.2 pp.89–90</a:t>
             </a:r>
           </a:p>
         </p:txBody>
@@ -42469,7 +42469,7 @@
                 </a:solidFill>
                 <a:latin typeface="Arial"/>
               </a:rPr>
-              <a:t>Textbook p.110 • Table 7.2 — Imperial length units</a:t>
+              <a:t>Textbook p.166 • Table 7.2 — Imperial length units</a:t>
             </a:r>
           </a:p>
         </p:txBody>

--- a/carpentry/intake-142/PowerPoint/Day-14_2026-11-24_Week-5.pptx
+++ b/carpentry/intake-142/PowerPoint/Day-14_2026-11-24_Week-5.pptx
@@ -19258,6 +19258,104 @@
           </a:p>
         </p:txBody>
       </p:sp>
+      <p:sp>
+        <p:nvSpPr>
+          <p:cNvPr id="22" name="Play quiz W05-L01"/>
+          <p:cNvSpPr txBox="1"/>
+          <p:nvPr/>
+        </p:nvSpPr>
+        <p:spPr>
+          <a:xfrm>
+            <a:off x="6355080" y="6606540"/>
+            <a:ext cx="822960" cy="210312"/>
+          </a:xfrm>
+          <a:prstGeom prst="rect">
+            <a:avLst/>
+          </a:prstGeom>
+          <a:noFill/>
+        </p:spPr>
+        <p:txBody>
+          <a:bodyPr wrap="square" lIns="0" rIns="0" tIns="0" bIns="0" anchor="t">
+            <a:normAutofit fontScale="100000" lnSpcReduction="0"/>
+          </a:bodyPr>
+          <a:lstStyle/>
+          <a:p>
+            <a:pPr>
+              <a:spcBef>
+                <a:spcPts val="0"/>
+              </a:spcBef>
+              <a:spcAft>
+                <a:spcPts val="0"/>
+              </a:spcAft>
+              <a:defRPr sz="1000" b="0">
+                <a:solidFill>
+                  <a:srgbClr val="D0002B"/>
+                </a:solidFill>
+                <a:latin typeface="Arial"/>
+              </a:defRPr>
+            </a:pPr>
+            <a:r>
+              <a:rPr sz="1000">
+                <a:solidFill>
+                  <a:srgbClr val="F7F8FC"/>
+                </a:solidFill>
+                <a:latin typeface="Arial"/>
+                <a:hlinkClick r:id="rId8"/>
+              </a:rPr>
+              <a:t>Play quiz</a:t>
+            </a:r>
+          </a:p>
+        </p:txBody>
+      </p:sp>
+      <p:sp>
+        <p:nvSpPr>
+          <p:cNvPr id="23" name="Quiz PDF W05-L01"/>
+          <p:cNvSpPr txBox="1"/>
+          <p:nvPr/>
+        </p:nvSpPr>
+        <p:spPr>
+          <a:xfrm>
+            <a:off x="7296912" y="6606540"/>
+            <a:ext cx="1005840" cy="210312"/>
+          </a:xfrm>
+          <a:prstGeom prst="rect">
+            <a:avLst/>
+          </a:prstGeom>
+          <a:noFill/>
+        </p:spPr>
+        <p:txBody>
+          <a:bodyPr wrap="square" lIns="0" rIns="0" tIns="0" bIns="0" anchor="t">
+            <a:normAutofit fontScale="100000" lnSpcReduction="0"/>
+          </a:bodyPr>
+          <a:lstStyle/>
+          <a:p>
+            <a:pPr>
+              <a:spcBef>
+                <a:spcPts val="0"/>
+              </a:spcBef>
+              <a:spcAft>
+                <a:spcPts val="0"/>
+              </a:spcAft>
+              <a:defRPr sz="1000" b="0">
+                <a:solidFill>
+                  <a:srgbClr val="D0002B"/>
+                </a:solidFill>
+                <a:latin typeface="Arial"/>
+              </a:defRPr>
+            </a:pPr>
+            <a:r>
+              <a:rPr sz="1000">
+                <a:solidFill>
+                  <a:srgbClr val="F7F8FC"/>
+                </a:solidFill>
+                <a:latin typeface="Arial"/>
+                <a:hlinkClick r:id="rId9"/>
+              </a:rPr>
+              <a:t>Quiz PDF</a:t>
+            </a:r>
+          </a:p>
+        </p:txBody>
+      </p:sp>
     </p:spTree>
   </p:cSld>
   <p:clrMapOvr>
@@ -38010,6 +38108,104 @@
                 <a:latin typeface="Arial"/>
               </a:rPr>
               <a:t>Day 14  •  2026-11-24  •  44</a:t>
+            </a:r>
+          </a:p>
+        </p:txBody>
+      </p:sp>
+      <p:sp>
+        <p:nvSpPr>
+          <p:cNvPr id="22" name="Play quiz W05-L02"/>
+          <p:cNvSpPr txBox="1"/>
+          <p:nvPr/>
+        </p:nvSpPr>
+        <p:spPr>
+          <a:xfrm>
+            <a:off x="6355080" y="6606540"/>
+            <a:ext cx="822960" cy="210312"/>
+          </a:xfrm>
+          <a:prstGeom prst="rect">
+            <a:avLst/>
+          </a:prstGeom>
+          <a:noFill/>
+        </p:spPr>
+        <p:txBody>
+          <a:bodyPr wrap="square" lIns="0" rIns="0" tIns="0" bIns="0" anchor="t">
+            <a:normAutofit fontScale="100000" lnSpcReduction="0"/>
+          </a:bodyPr>
+          <a:lstStyle/>
+          <a:p>
+            <a:pPr>
+              <a:spcBef>
+                <a:spcPts val="0"/>
+              </a:spcBef>
+              <a:spcAft>
+                <a:spcPts val="0"/>
+              </a:spcAft>
+              <a:defRPr sz="1000" b="0">
+                <a:solidFill>
+                  <a:srgbClr val="D0002B"/>
+                </a:solidFill>
+                <a:latin typeface="Arial"/>
+              </a:defRPr>
+            </a:pPr>
+            <a:r>
+              <a:rPr sz="1000">
+                <a:solidFill>
+                  <a:srgbClr val="F7F8FC"/>
+                </a:solidFill>
+                <a:latin typeface="Arial"/>
+                <a:hlinkClick r:id="rId8"/>
+              </a:rPr>
+              <a:t>Play quiz</a:t>
+            </a:r>
+          </a:p>
+        </p:txBody>
+      </p:sp>
+      <p:sp>
+        <p:nvSpPr>
+          <p:cNvPr id="23" name="Quiz PDF W05-L02"/>
+          <p:cNvSpPr txBox="1"/>
+          <p:nvPr/>
+        </p:nvSpPr>
+        <p:spPr>
+          <a:xfrm>
+            <a:off x="7296912" y="6606540"/>
+            <a:ext cx="1005840" cy="210312"/>
+          </a:xfrm>
+          <a:prstGeom prst="rect">
+            <a:avLst/>
+          </a:prstGeom>
+          <a:noFill/>
+        </p:spPr>
+        <p:txBody>
+          <a:bodyPr wrap="square" lIns="0" rIns="0" tIns="0" bIns="0" anchor="t">
+            <a:normAutofit fontScale="100000" lnSpcReduction="0"/>
+          </a:bodyPr>
+          <a:lstStyle/>
+          <a:p>
+            <a:pPr>
+              <a:spcBef>
+                <a:spcPts val="0"/>
+              </a:spcBef>
+              <a:spcAft>
+                <a:spcPts val="0"/>
+              </a:spcAft>
+              <a:defRPr sz="1000" b="0">
+                <a:solidFill>
+                  <a:srgbClr val="D0002B"/>
+                </a:solidFill>
+                <a:latin typeface="Arial"/>
+              </a:defRPr>
+            </a:pPr>
+            <a:r>
+              <a:rPr sz="1000">
+                <a:solidFill>
+                  <a:srgbClr val="F7F8FC"/>
+                </a:solidFill>
+                <a:latin typeface="Arial"/>
+                <a:hlinkClick r:id="rId9"/>
+              </a:rPr>
+              <a:t>Quiz PDF</a:t>
             </a:r>
           </a:p>
         </p:txBody>
